--- a/presentation/review-2-ppt.pptx
+++ b/presentation/review-2-ppt.pptx
@@ -9828,7 +9828,7 @@
                           </a:solidFill>
                           <a:latin typeface="Calibri"/>
                         </a:rPr>
-                        <a:t>0.683</a:t>
+                        <a:t>0.667</a:t>
                       </a:r>
                     </a:p>
                   </a:txBody>
@@ -9850,7 +9850,7 @@
                           </a:solidFill>
                           <a:latin typeface="Calibri"/>
                         </a:rPr>
-                        <a:t>0.183</a:t>
+                        <a:t>0.250</a:t>
                       </a:r>
                     </a:p>
                   </a:txBody>
@@ -9872,7 +9872,7 @@
                           </a:solidFill>
                           <a:latin typeface="Calibri"/>
                         </a:rPr>
-                        <a:t>0.755</a:t>
+                        <a:t>0.743</a:t>
                       </a:r>
                     </a:p>
                   </a:txBody>
@@ -9894,7 +9894,7 @@
                           </a:solidFill>
                           <a:latin typeface="Calibri"/>
                         </a:rPr>
-                        <a:t>1.58s</a:t>
+                        <a:t>1.80s</a:t>
                       </a:r>
                     </a:p>
                   </a:txBody>
@@ -9962,7 +9962,7 @@
                           </a:solidFill>
                           <a:latin typeface="Calibri"/>
                         </a:rPr>
-                        <a:t>0.717</a:t>
+                        <a:t>0.700</a:t>
                       </a:r>
                     </a:p>
                   </a:txBody>
@@ -9984,7 +9984,7 @@
                           </a:solidFill>
                           <a:latin typeface="Calibri"/>
                         </a:rPr>
-                        <a:t>0.117</a:t>
+                        <a:t>0.150</a:t>
                       </a:r>
                     </a:p>
                   </a:txBody>
@@ -10006,7 +10006,7 @@
                           </a:solidFill>
                           <a:latin typeface="Calibri"/>
                         </a:rPr>
-                        <a:t>0.844</a:t>
+                        <a:t>0.829</a:t>
                       </a:r>
                     </a:p>
                   </a:txBody>
@@ -10028,7 +10028,7 @@
                           </a:solidFill>
                           <a:latin typeface="Calibri"/>
                         </a:rPr>
-                        <a:t>1.80s</a:t>
+                        <a:t>1.65s</a:t>
                       </a:r>
                     </a:p>
                   </a:txBody>
@@ -10050,7 +10050,7 @@
                           </a:solidFill>
                           <a:latin typeface="Calibri"/>
                         </a:rPr>
-                        <a:t>$0.000137</a:t>
+                        <a:t>$0.000136</a:t>
                       </a:r>
                     </a:p>
                   </a:txBody>
@@ -10096,7 +10096,7 @@
                           </a:solidFill>
                           <a:latin typeface="Calibri"/>
                         </a:rPr>
-                        <a:t>0.700</a:t>
+                        <a:t>0.767</a:t>
                       </a:r>
                     </a:p>
                   </a:txBody>
@@ -10118,7 +10118,7 @@
                           </a:solidFill>
                           <a:latin typeface="Calibri"/>
                         </a:rPr>
-                        <a:t>0.167</a:t>
+                        <a:t>0.183</a:t>
                       </a:r>
                     </a:p>
                   </a:txBody>
@@ -10140,7 +10140,7 @@
                           </a:solidFill>
                           <a:latin typeface="Calibri"/>
                         </a:rPr>
-                        <a:t>0.801</a:t>
+                        <a:t>0.744</a:t>
                       </a:r>
                     </a:p>
                   </a:txBody>
@@ -10162,7 +10162,7 @@
                           </a:solidFill>
                           <a:latin typeface="Calibri"/>
                         </a:rPr>
-                        <a:t>3.23s</a:t>
+                        <a:t>2.79s</a:t>
                       </a:r>
                     </a:p>
                   </a:txBody>
@@ -10184,7 +10184,7 @@
                           </a:solidFill>
                           <a:latin typeface="Calibri"/>
                         </a:rPr>
-                        <a:t>$0.000172</a:t>
+                        <a:t>$0.000167</a:t>
                       </a:r>
                     </a:p>
                   </a:txBody>
@@ -10230,7 +10230,7 @@
                           </a:solidFill>
                           <a:latin typeface="Calibri"/>
                         </a:rPr>
-                        <a:t>0.683</a:t>
+                        <a:t>0.717</a:t>
                       </a:r>
                     </a:p>
                   </a:txBody>
@@ -10274,7 +10274,7 @@
                           </a:solidFill>
                           <a:latin typeface="Calibri"/>
                         </a:rPr>
-                        <a:t>0.858</a:t>
+                        <a:t>0.866</a:t>
                       </a:r>
                     </a:p>
                   </a:txBody>
@@ -10296,7 +10296,7 @@
                           </a:solidFill>
                           <a:latin typeface="Calibri"/>
                         </a:rPr>
-                        <a:t>2.99s</a:t>
+                        <a:t>3.10s</a:t>
                       </a:r>
                     </a:p>
                   </a:txBody>
@@ -10318,7 +10318,7 @@
                           </a:solidFill>
                           <a:latin typeface="Calibri"/>
                         </a:rPr>
-                        <a:t>$0.000193</a:t>
+                        <a:t>$0.000191</a:t>
                       </a:r>
                     </a:p>
                   </a:txBody>
@@ -10342,7 +10342,7 @@
         <p:spPr>
           <a:xfrm>
             <a:off x="548640" y="3749039"/>
-            <a:ext cx="5029200" cy="274320"/>
+            <a:ext cx="5760720" cy="274320"/>
           </a:xfrm>
           <a:prstGeom prst="rect">
             <a:avLst/>
@@ -10420,7 +10420,7 @@
                 </a:solidFill>
                 <a:latin typeface="Calibri"/>
               </a:rPr>
-              <a:t>0.87</a:t>
+              <a:t>0.81</a:t>
             </a:r>
           </a:p>
           <a:p>
@@ -10550,7 +10550,7 @@
                 </a:solidFill>
                 <a:latin typeface="Calibri"/>
               </a:rPr>
-              <a:t>0.87</a:t>
+              <a:t>0.84</a:t>
             </a:r>
           </a:p>
           <a:p>
@@ -10615,7 +10615,7 @@
                 </a:solidFill>
                 <a:latin typeface="Calibri"/>
               </a:rPr>
-              <a:t>0.87</a:t>
+              <a:t>0.83</a:t>
             </a:r>
           </a:p>
           <a:p>
@@ -11334,7 +11334,7 @@
                 </a:solidFill>
                 <a:latin typeface="Calibri"/>
               </a:rPr>
-              <a:t>Structured Output wins on grounding </a:t>
+              <a:t>Structured Output's grounding advantage is robust across two independent runs — </a:t>
             </a:r>
             <a:r>
               <a:rPr sz="1200">
@@ -11343,7 +11343,7 @@
                 </a:solidFill>
                 <a:latin typeface="Calibri"/>
               </a:rPr>
-              <a:t>(lowest hallucination, highest Faithfulness/Relevancy) but has the lowest accuracy — forcing verbatim citation makes it hedge on answerable questions.</a:t>
+              <a:t>lowest hallucination rate both times (10.0% exactly, both runs), and the ranking Structured &lt; Few-shot &lt; Chain-of-Thought &lt; Zero-shot on hallucination rate held in both.</a:t>
             </a:r>
           </a:p>
           <a:p>
@@ -11371,7 +11371,7 @@
                 </a:solidFill>
                 <a:latin typeface="Calibri"/>
               </a:rPr>
-              <a:t>Chain-of-Thought does not beat Few-shot </a:t>
+              <a:t>Which strategy has the best accuracy is NOT stable across runs — </a:t>
             </a:r>
             <a:r>
               <a:rPr sz="1200">
@@ -11380,7 +11380,7 @@
                 </a:solidFill>
                 <a:latin typeface="Calibri"/>
               </a:rPr>
-              <a:t>on hallucination rate (16.7% vs 11.7%) despite ~2x the latency — contradicts the going-in hypothesis, and is reported honestly rather than smoothed over.</a:t>
+              <a:t>Few-shot led the first n=60 run (71.7%); Chain-of-Thought leads this run (76.7%). That instability is itself the evidence motivating the statistical-significance work still remaining, not a settled result yet.</a:t>
             </a:r>
           </a:p>
           <a:p>
@@ -11408,7 +11408,7 @@
                 </a:solidFill>
                 <a:latin typeface="Calibri"/>
               </a:rPr>
-              <a:t>Few-shot is the strongest all-around strategy </a:t>
+              <a:t>Zero-shot is consistently the weakest strategy — </a:t>
             </a:r>
             <a:r>
               <a:rPr sz="1200">
@@ -11417,7 +11417,7 @@
                 </a:solidFill>
                 <a:latin typeface="Calibri"/>
               </a:rPr>
-              <a:t>in this run: best accuracy, second-best hallucination rate, far cheaper than CoT or Structured Output.</a:t>
+              <a:t>highest hallucination rate in both runs and lowest accuracy in this run — the strongest and most repeatable finding is simply that prompting strategy matters at all.</a:t>
             </a:r>
           </a:p>
         </p:txBody>
@@ -11737,7 +11737,7 @@
                 </a:solidFill>
                 <a:latin typeface="Calibri"/>
               </a:rPr>
-              <a:t>Statistical significance / confidence intervals on the observed strategy gaps (not yet computed at n=60).</a:t>
+              <a:t>Statistical significance / confidence intervals on the observed strategy gaps — two independent n=60 runs already show the accuracy ranking is not stable, which is exactly why this can't be skipped.</a:t>
             </a:r>
           </a:p>
           <a:p>
